--- a/slide/themes/src/30_spaces and faces.pptx
+++ b/slide/themes/src/30_spaces and faces.pptx
@@ -644,11 +644,7 @@
           </a:bodyPr>
           <a:lstStyle>
             <a:lvl1pPr algn="r">
-              <a:defRPr sz="8600" b="1">
-                <a:latin typeface="Arial Black"/>
-                <a:ea typeface="Arial Black"/>
-                <a:cs typeface="Arial Black"/>
-              </a:defRPr>
+              <a:defRPr sz="8600" b="1"/>
             </a:lvl1pPr>
             <a:lvl2pPr algn="r">
               <a:defRPr sz="8600" b="1"/>
@@ -2323,67 +2319,31 @@
           </a:bodyPr>
           <a:lstStyle>
             <a:lvl1pPr algn="r">
-              <a:defRPr sz="6000">
-                <a:latin typeface="Arial Black"/>
-                <a:ea typeface="Arial Black"/>
-                <a:cs typeface="Arial Black"/>
-              </a:defRPr>
+              <a:defRPr sz="6000"/>
             </a:lvl1pPr>
             <a:lvl2pPr algn="r">
-              <a:defRPr>
-                <a:latin typeface="Arial Black"/>
-                <a:ea typeface="Arial Black"/>
-                <a:cs typeface="Arial Black"/>
-              </a:defRPr>
+              <a:defRPr/>
             </a:lvl2pPr>
             <a:lvl3pPr algn="r">
-              <a:defRPr>
-                <a:latin typeface="Arial Black"/>
-                <a:ea typeface="Arial Black"/>
-                <a:cs typeface="Arial Black"/>
-              </a:defRPr>
+              <a:defRPr/>
             </a:lvl3pPr>
             <a:lvl4pPr algn="r">
-              <a:defRPr>
-                <a:latin typeface="Arial Black"/>
-                <a:ea typeface="Arial Black"/>
-                <a:cs typeface="Arial Black"/>
-              </a:defRPr>
+              <a:defRPr/>
             </a:lvl4pPr>
             <a:lvl5pPr algn="r">
-              <a:defRPr>
-                <a:latin typeface="Arial Black"/>
-                <a:ea typeface="Arial Black"/>
-                <a:cs typeface="Arial Black"/>
-              </a:defRPr>
+              <a:defRPr/>
             </a:lvl5pPr>
             <a:lvl6pPr algn="r">
-              <a:defRPr>
-                <a:latin typeface="Arial Black"/>
-                <a:ea typeface="Arial Black"/>
-                <a:cs typeface="Arial Black"/>
-              </a:defRPr>
+              <a:defRPr/>
             </a:lvl6pPr>
             <a:lvl7pPr algn="r">
-              <a:defRPr>
-                <a:latin typeface="Arial Black"/>
-                <a:ea typeface="Arial Black"/>
-                <a:cs typeface="Arial Black"/>
-              </a:defRPr>
+              <a:defRPr/>
             </a:lvl7pPr>
             <a:lvl8pPr algn="r">
-              <a:defRPr>
-                <a:latin typeface="Arial Black"/>
-                <a:ea typeface="Arial Black"/>
-                <a:cs typeface="Arial Black"/>
-              </a:defRPr>
+              <a:defRPr/>
             </a:lvl8pPr>
             <a:lvl9pPr algn="r">
-              <a:defRPr>
-                <a:latin typeface="Arial Black"/>
-                <a:ea typeface="Arial Black"/>
-                <a:cs typeface="Arial Black"/>
-              </a:defRPr>
+              <a:defRPr/>
             </a:lvl9pPr>
           </a:lstStyle>
           <a:p>
@@ -2487,67 +2447,31 @@
           </a:bodyPr>
           <a:lstStyle>
             <a:lvl1pPr algn="r">
-              <a:defRPr sz="6000">
-                <a:latin typeface="Arial Black"/>
-                <a:ea typeface="Arial Black"/>
-                <a:cs typeface="Arial Black"/>
-              </a:defRPr>
+              <a:defRPr sz="6000"/>
             </a:lvl1pPr>
             <a:lvl2pPr algn="r">
-              <a:defRPr>
-                <a:latin typeface="Arial Black"/>
-                <a:ea typeface="Arial Black"/>
-                <a:cs typeface="Arial Black"/>
-              </a:defRPr>
+              <a:defRPr/>
             </a:lvl2pPr>
             <a:lvl3pPr algn="r">
-              <a:defRPr>
-                <a:latin typeface="Arial Black"/>
-                <a:ea typeface="Arial Black"/>
-                <a:cs typeface="Arial Black"/>
-              </a:defRPr>
+              <a:defRPr/>
             </a:lvl3pPr>
             <a:lvl4pPr algn="r">
-              <a:defRPr>
-                <a:latin typeface="Arial Black"/>
-                <a:ea typeface="Arial Black"/>
-                <a:cs typeface="Arial Black"/>
-              </a:defRPr>
+              <a:defRPr/>
             </a:lvl4pPr>
             <a:lvl5pPr algn="r">
-              <a:defRPr>
-                <a:latin typeface="Arial Black"/>
-                <a:ea typeface="Arial Black"/>
-                <a:cs typeface="Arial Black"/>
-              </a:defRPr>
+              <a:defRPr/>
             </a:lvl5pPr>
             <a:lvl6pPr algn="r">
-              <a:defRPr>
-                <a:latin typeface="Arial Black"/>
-                <a:ea typeface="Arial Black"/>
-                <a:cs typeface="Arial Black"/>
-              </a:defRPr>
+              <a:defRPr/>
             </a:lvl6pPr>
             <a:lvl7pPr algn="r">
-              <a:defRPr>
-                <a:latin typeface="Arial Black"/>
-                <a:ea typeface="Arial Black"/>
-                <a:cs typeface="Arial Black"/>
-              </a:defRPr>
+              <a:defRPr/>
             </a:lvl7pPr>
             <a:lvl8pPr algn="r">
-              <a:defRPr>
-                <a:latin typeface="Arial Black"/>
-                <a:ea typeface="Arial Black"/>
-                <a:cs typeface="Arial Black"/>
-              </a:defRPr>
+              <a:defRPr/>
             </a:lvl8pPr>
             <a:lvl9pPr algn="r">
-              <a:defRPr>
-                <a:latin typeface="Arial Black"/>
-                <a:ea typeface="Arial Black"/>
-                <a:cs typeface="Arial Black"/>
-              </a:defRPr>
+              <a:defRPr/>
             </a:lvl9pPr>
           </a:lstStyle>
           <a:p>
@@ -4009,67 +3933,31 @@
           </a:bodyPr>
           <a:lstStyle>
             <a:lvl1pPr algn="r">
-              <a:defRPr>
-                <a:latin typeface="Arial"/>
-                <a:ea typeface="Arial"/>
-                <a:cs typeface="Arial"/>
-              </a:defRPr>
+              <a:defRPr/>
             </a:lvl1pPr>
             <a:lvl2pPr>
-              <a:defRPr>
-                <a:latin typeface="Arial Black"/>
-                <a:ea typeface="Arial Black"/>
-                <a:cs typeface="Arial Black"/>
-              </a:defRPr>
+              <a:defRPr/>
             </a:lvl2pPr>
             <a:lvl3pPr>
-              <a:defRPr>
-                <a:latin typeface="Arial Black"/>
-                <a:ea typeface="Arial Black"/>
-                <a:cs typeface="Arial Black"/>
-              </a:defRPr>
+              <a:defRPr/>
             </a:lvl3pPr>
             <a:lvl4pPr>
-              <a:defRPr>
-                <a:latin typeface="Arial Black"/>
-                <a:ea typeface="Arial Black"/>
-                <a:cs typeface="Arial Black"/>
-              </a:defRPr>
+              <a:defRPr/>
             </a:lvl4pPr>
             <a:lvl5pPr>
-              <a:defRPr>
-                <a:latin typeface="Arial Black"/>
-                <a:ea typeface="Arial Black"/>
-                <a:cs typeface="Arial Black"/>
-              </a:defRPr>
+              <a:defRPr/>
             </a:lvl5pPr>
             <a:lvl6pPr>
-              <a:defRPr>
-                <a:latin typeface="Arial Black"/>
-                <a:ea typeface="Arial Black"/>
-                <a:cs typeface="Arial Black"/>
-              </a:defRPr>
+              <a:defRPr/>
             </a:lvl6pPr>
             <a:lvl7pPr>
-              <a:defRPr>
-                <a:latin typeface="Arial Black"/>
-                <a:ea typeface="Arial Black"/>
-                <a:cs typeface="Arial Black"/>
-              </a:defRPr>
+              <a:defRPr/>
             </a:lvl7pPr>
             <a:lvl8pPr>
-              <a:defRPr>
-                <a:latin typeface="Arial Black"/>
-                <a:ea typeface="Arial Black"/>
-                <a:cs typeface="Arial Black"/>
-              </a:defRPr>
+              <a:defRPr/>
             </a:lvl8pPr>
             <a:lvl9pPr>
-              <a:defRPr>
-                <a:latin typeface="Arial Black"/>
-                <a:ea typeface="Arial Black"/>
-                <a:cs typeface="Arial Black"/>
-              </a:defRPr>
+              <a:defRPr/>
             </a:lvl9pPr>
           </a:lstStyle>
           <a:p>
@@ -4859,13 +4747,13 @@
     </a:clrScheme>
     <a:fontScheme name="Office Theme">
       <a:majorFont>
-        <a:latin typeface="Arial"/>
-        <a:ea typeface="SimSun"/>
+        <a:latin typeface="Arial Black"/>
+        <a:ea typeface="SimHei"/>
         <a:cs typeface="Arial"/>
       </a:majorFont>
       <a:minorFont>
         <a:latin typeface="Arial"/>
-        <a:ea typeface="SimSun"/>
+        <a:ea typeface="Microsoft YaHei"/>
         <a:cs typeface="Arial"/>
       </a:minorFont>
     </a:fontScheme>
@@ -5096,13 +4984,13 @@
     </a:clrScheme>
     <a:fontScheme name="Arial">
       <a:majorFont>
-        <a:latin typeface="Arial"/>
-        <a:ea typeface="Arial"/>
+        <a:latin typeface="Arial Black"/>
+        <a:ea typeface="SimHei"/>
         <a:cs typeface="Arial"/>
       </a:majorFont>
       <a:minorFont>
         <a:latin typeface="Arial"/>
-        <a:ea typeface="Arial"/>
+        <a:ea typeface="Microsoft YaHei"/>
         <a:cs typeface="Arial"/>
       </a:minorFont>
     </a:fontScheme>

--- a/slide/themes/src/30_spaces and faces.pptx
+++ b/slide/themes/src/30_spaces and faces.pptx
@@ -536,10 +536,7 @@
             <a:pPr>
               <a:defRPr/>
             </a:pPr>
-            <a:endParaRPr lang="en-US">
-              <a:latin typeface="Arial"/>
-              <a:cs typeface="Arial"/>
-            </a:endParaRPr>
+            <a:endParaRPr lang="en-US"/>
           </a:p>
         </p:txBody>
       </p:sp>
